--- a/Slides/2025-2026/Slides/Statistiek 2025-2026 -- college 5a -- normale verdeling.pptx
+++ b/Slides/2025-2026/Slides/Statistiek 2025-2026 -- college 5a -- normale verdeling.pptx
@@ -1699,6 +1699,270 @@
     <p:extLst>
       <p:ext uri="{BB962C8B-B14F-4D97-AF65-F5344CB8AC3E}">
         <p14:creationId xmlns:p14="http://schemas.microsoft.com/office/powerpoint/2010/main" val="3222117717"/>
+      </p:ext>
+    </p:extLst>
+  </p:cSld>
+  <p:clrMapOvr>
+    <a:masterClrMapping/>
+  </p:clrMapOvr>
+</p:notes>
+</file>
+
+<file path=ppt/notesSlides/notesSlide5.xml><?xml version="1.0" encoding="utf-8"?>
+<p:notes xmlns:a="http://schemas.openxmlformats.org/drawingml/2006/main" xmlns:r="http://schemas.openxmlformats.org/officeDocument/2006/relationships" xmlns:p="http://schemas.openxmlformats.org/presentationml/2006/main">
+  <p:cSld>
+    <p:spTree>
+      <p:nvGrpSpPr>
+        <p:cNvPr id="1" name=""/>
+        <p:cNvGrpSpPr/>
+        <p:nvPr/>
+      </p:nvGrpSpPr>
+      <p:grpSpPr>
+        <a:xfrm>
+          <a:off x="0" y="0"/>
+          <a:ext cx="0" cy="0"/>
+          <a:chOff x="0" y="0"/>
+          <a:chExt cx="0" cy="0"/>
+        </a:xfrm>
+      </p:grpSpPr>
+      <p:sp>
+        <p:nvSpPr>
+          <p:cNvPr id="2" name="Tijdelijke aanduiding voor dia-afbeelding 1"/>
+          <p:cNvSpPr>
+            <a:spLocks noGrp="1" noRot="1" noChangeAspect="1"/>
+          </p:cNvSpPr>
+          <p:nvPr>
+            <p:ph type="sldImg"/>
+          </p:nvPr>
+        </p:nvSpPr>
+        <p:spPr/>
+      </p:sp>
+      <p:sp>
+        <p:nvSpPr>
+          <p:cNvPr id="3" name="Tijdelijke aanduiding voor notities 2"/>
+          <p:cNvSpPr>
+            <a:spLocks noGrp="1"/>
+          </p:cNvSpPr>
+          <p:nvPr>
+            <p:ph type="body" idx="1"/>
+          </p:nvPr>
+        </p:nvSpPr>
+        <p:spPr/>
+        <p:txBody>
+          <a:bodyPr/>
+          <a:lstStyle/>
+          <a:p>
+            <a:r>
+              <a:rPr lang="nl-NL" dirty="0" smtClean="0"/>
+              <a:t>Voordat we de opdracht uitvoeren: doe</a:t>
+            </a:r>
+            <a:r>
+              <a:rPr lang="nl-NL" baseline="0" dirty="0" smtClean="0"/>
+              <a:t> een </a:t>
+            </a:r>
+            <a:r>
+              <a:rPr lang="nl-NL" baseline="0" dirty="0" err="1" smtClean="0"/>
+              <a:t>sanity</a:t>
+            </a:r>
+            <a:r>
+              <a:rPr lang="nl-NL" baseline="0" dirty="0" smtClean="0"/>
+              <a:t> check (wat voor waarde verwachten we als antwoord -&gt; </a:t>
+            </a:r>
+            <a:r>
+              <a:rPr lang="nl-NL" baseline="0" dirty="0" err="1" smtClean="0"/>
+              <a:t>z</a:t>
+            </a:r>
+            <a:r>
+              <a:rPr lang="nl-NL" baseline="0" dirty="0" smtClean="0"/>
+              <a:t>-score zal negatief zijn, want 30 &lt; 32 -&gt; kans op kleinere uitkomst zal kleiner dan ½ moeten zijn).</a:t>
+            </a:r>
+            <a:endParaRPr lang="nl-NL" dirty="0"/>
+          </a:p>
+        </p:txBody>
+      </p:sp>
+      <p:sp>
+        <p:nvSpPr>
+          <p:cNvPr id="4" name="Tijdelijke aanduiding voor voettekst 3"/>
+          <p:cNvSpPr>
+            <a:spLocks noGrp="1"/>
+          </p:cNvSpPr>
+          <p:nvPr>
+            <p:ph type="ftr" sz="quarter" idx="10"/>
+          </p:nvPr>
+        </p:nvSpPr>
+        <p:spPr/>
+        <p:txBody>
+          <a:bodyPr/>
+          <a:lstStyle/>
+          <a:p>
+            <a:pPr>
+              <a:defRPr/>
+            </a:pPr>
+            <a:r>
+              <a:rPr lang="en-US" smtClean="0"/>
+              <a:t>Eventuele voettekst</a:t>
+            </a:r>
+            <a:endParaRPr lang="en-US" dirty="0"/>
+          </a:p>
+        </p:txBody>
+      </p:sp>
+      <p:sp>
+        <p:nvSpPr>
+          <p:cNvPr id="5" name="Tijdelijke aanduiding voor dianummer 4"/>
+          <p:cNvSpPr>
+            <a:spLocks noGrp="1"/>
+          </p:cNvSpPr>
+          <p:nvPr>
+            <p:ph type="sldNum" sz="quarter" idx="11"/>
+          </p:nvPr>
+        </p:nvSpPr>
+        <p:spPr/>
+        <p:txBody>
+          <a:bodyPr/>
+          <a:lstStyle/>
+          <a:p>
+            <a:pPr>
+              <a:defRPr/>
+            </a:pPr>
+            <a:fld id="{9FC98DC9-4F28-4B39-8B6E-408133FC7853}" type="slidenum">
+              <a:rPr lang="en-US" smtClean="0"/>
+              <a:pPr>
+                <a:defRPr/>
+              </a:pPr>
+              <a:t>16</a:t>
+            </a:fld>
+            <a:endParaRPr lang="en-US" dirty="0"/>
+          </a:p>
+        </p:txBody>
+      </p:sp>
+    </p:spTree>
+    <p:extLst>
+      <p:ext uri="{BB962C8B-B14F-4D97-AF65-F5344CB8AC3E}">
+        <p14:creationId xmlns:p14="http://schemas.microsoft.com/office/powerpoint/2010/main" val="2586906160"/>
+      </p:ext>
+    </p:extLst>
+  </p:cSld>
+  <p:clrMapOvr>
+    <a:masterClrMapping/>
+  </p:clrMapOvr>
+</p:notes>
+</file>
+
+<file path=ppt/notesSlides/notesSlide6.xml><?xml version="1.0" encoding="utf-8"?>
+<p:notes xmlns:a="http://schemas.openxmlformats.org/drawingml/2006/main" xmlns:r="http://schemas.openxmlformats.org/officeDocument/2006/relationships" xmlns:p="http://schemas.openxmlformats.org/presentationml/2006/main">
+  <p:cSld>
+    <p:spTree>
+      <p:nvGrpSpPr>
+        <p:cNvPr id="1" name=""/>
+        <p:cNvGrpSpPr/>
+        <p:nvPr/>
+      </p:nvGrpSpPr>
+      <p:grpSpPr>
+        <a:xfrm>
+          <a:off x="0" y="0"/>
+          <a:ext cx="0" cy="0"/>
+          <a:chOff x="0" y="0"/>
+          <a:chExt cx="0" cy="0"/>
+        </a:xfrm>
+      </p:grpSpPr>
+      <p:sp>
+        <p:nvSpPr>
+          <p:cNvPr id="2" name="Tijdelijke aanduiding voor dia-afbeelding 1"/>
+          <p:cNvSpPr>
+            <a:spLocks noGrp="1" noRot="1" noChangeAspect="1"/>
+          </p:cNvSpPr>
+          <p:nvPr>
+            <p:ph type="sldImg"/>
+          </p:nvPr>
+        </p:nvSpPr>
+        <p:spPr/>
+      </p:sp>
+      <p:sp>
+        <p:nvSpPr>
+          <p:cNvPr id="3" name="Tijdelijke aanduiding voor notities 2"/>
+          <p:cNvSpPr>
+            <a:spLocks noGrp="1"/>
+          </p:cNvSpPr>
+          <p:nvPr>
+            <p:ph type="body" idx="1"/>
+          </p:nvPr>
+        </p:nvSpPr>
+        <p:spPr/>
+        <p:txBody>
+          <a:bodyPr/>
+          <a:lstStyle/>
+          <a:p>
+            <a:r>
+              <a:rPr lang="nl-NL" dirty="0" err="1" smtClean="0"/>
+              <a:t>Sanity</a:t>
+            </a:r>
+            <a:r>
+              <a:rPr lang="nl-NL" dirty="0" smtClean="0"/>
+              <a:t> check</a:t>
+            </a:r>
+            <a:endParaRPr lang="nl-NL" dirty="0"/>
+          </a:p>
+        </p:txBody>
+      </p:sp>
+      <p:sp>
+        <p:nvSpPr>
+          <p:cNvPr id="4" name="Tijdelijke aanduiding voor voettekst 3"/>
+          <p:cNvSpPr>
+            <a:spLocks noGrp="1"/>
+          </p:cNvSpPr>
+          <p:nvPr>
+            <p:ph type="ftr" sz="quarter" idx="10"/>
+          </p:nvPr>
+        </p:nvSpPr>
+        <p:spPr/>
+        <p:txBody>
+          <a:bodyPr/>
+          <a:lstStyle/>
+          <a:p>
+            <a:pPr>
+              <a:defRPr/>
+            </a:pPr>
+            <a:r>
+              <a:rPr lang="en-US" smtClean="0"/>
+              <a:t>Eventuele voettekst</a:t>
+            </a:r>
+            <a:endParaRPr lang="en-US" dirty="0"/>
+          </a:p>
+        </p:txBody>
+      </p:sp>
+      <p:sp>
+        <p:nvSpPr>
+          <p:cNvPr id="5" name="Tijdelijke aanduiding voor dianummer 4"/>
+          <p:cNvSpPr>
+            <a:spLocks noGrp="1"/>
+          </p:cNvSpPr>
+          <p:nvPr>
+            <p:ph type="sldNum" sz="quarter" idx="11"/>
+          </p:nvPr>
+        </p:nvSpPr>
+        <p:spPr/>
+        <p:txBody>
+          <a:bodyPr/>
+          <a:lstStyle/>
+          <a:p>
+            <a:pPr>
+              <a:defRPr/>
+            </a:pPr>
+            <a:fld id="{9FC98DC9-4F28-4B39-8B6E-408133FC7853}" type="slidenum">
+              <a:rPr lang="en-US" smtClean="0"/>
+              <a:pPr>
+                <a:defRPr/>
+              </a:pPr>
+              <a:t>18</a:t>
+            </a:fld>
+            <a:endParaRPr lang="en-US" dirty="0"/>
+          </a:p>
+        </p:txBody>
+      </p:sp>
+    </p:spTree>
+    <p:extLst>
+      <p:ext uri="{BB962C8B-B14F-4D97-AF65-F5344CB8AC3E}">
+        <p14:creationId xmlns:p14="http://schemas.microsoft.com/office/powerpoint/2010/main" val="443422074"/>
       </p:ext>
     </p:extLst>
   </p:cSld>
@@ -13398,7 +13662,7 @@
                 <a:ext cx="10611792" cy="4246562"/>
               </a:xfrm>
               <a:blipFill>
-                <a:blip r:embed="rId2"/>
+                <a:blip r:embed="rId3"/>
                 <a:stretch>
                   <a:fillRect l="-1608" t="-2009" b="-2439"/>
                 </a:stretch>
@@ -20953,7 +21217,7 @@
                             <a:rPr lang="nl-NL" sz="2400" b="0" i="1" smtClean="0">
                               <a:latin typeface="Cambria Math" panose="02040503050406030204" pitchFamily="18" charset="0"/>
                             </a:rPr>
-                            <m:t>05</m:t>
+                            <m:t>95</m:t>
                           </m:r>
                           <m:r>
                             <a:rPr lang="en-US" sz="2400" b="0" i="1" smtClean="0">
@@ -26160,7 +26424,7 @@
 </file>
 
 <file path=ppt/slides/slide6.xml><?xml version="1.0" encoding="utf-8"?>
-<p:sld xmlns:a="http://schemas.openxmlformats.org/drawingml/2006/main" xmlns:r="http://schemas.openxmlformats.org/officeDocument/2006/relationships" xmlns:p="http://schemas.openxmlformats.org/presentationml/2006/main">
+<p:sld xmlns:a="http://schemas.openxmlformats.org/drawingml/2006/main" xmlns:r="http://schemas.openxmlformats.org/officeDocument/2006/relationships" xmlns:p="http://schemas.openxmlformats.org/presentationml/2006/main" show="0">
   <p:cSld>
     <p:spTree>
       <p:nvGrpSpPr>
@@ -26754,6 +27018,14 @@
   <p:clrMapOvr>
     <a:masterClrMapping/>
   </p:clrMapOvr>
+  <mc:AlternateContent xmlns:mc="http://schemas.openxmlformats.org/markup-compatibility/2006">
+    <mc:Choice xmlns:p14="http://schemas.microsoft.com/office/powerpoint/2010/main" Requires="p14">
+      <p:transition spd="slow" p14:dur="2000"/>
+    </mc:Choice>
+    <mc:Fallback>
+      <p:transition spd="slow"/>
+    </mc:Fallback>
+  </mc:AlternateContent>
   <p:timing>
     <p:tnLst>
       <p:par>
@@ -28150,10 +28422,6 @@
               </a:p>
               <a:p>
                 <a:pPr eaLnBrk="1" hangingPunct="1"/>
-                <a:endParaRPr lang="en-US" sz="2800" dirty="0" smtClean="0"/>
-              </a:p>
-              <a:p>
-                <a:pPr eaLnBrk="1" hangingPunct="1"/>
                 <a:r>
                   <a:rPr lang="en-US" sz="2400" b="1" dirty="0" err="1" smtClean="0"/>
                   <a:t>Oefening</a:t>
@@ -28305,6 +28573,69 @@
                   <a:t>.</a:t>
                 </a:r>
               </a:p>
+              <a:p>
+                <a:pPr eaLnBrk="1" hangingPunct="1"/>
+                <a:endParaRPr lang="en-US" sz="2400" dirty="0"/>
+              </a:p>
+              <a:p>
+                <a:pPr eaLnBrk="1" hangingPunct="1"/>
+                <a:r>
+                  <a:rPr lang="en-US" sz="2400" b="1" dirty="0" err="1" smtClean="0"/>
+                  <a:t>Dit</a:t>
+                </a:r>
+                <a:r>
+                  <a:rPr lang="en-US" sz="2400" b="1" dirty="0" smtClean="0"/>
+                  <a:t> </a:t>
+                </a:r>
+                <a:r>
+                  <a:rPr lang="en-US" sz="2400" b="1" dirty="0" err="1" smtClean="0"/>
+                  <a:t>wil</a:t>
+                </a:r>
+                <a:r>
+                  <a:rPr lang="en-US" sz="2400" b="1" dirty="0" smtClean="0"/>
+                  <a:t> je </a:t>
+                </a:r>
+                <a:r>
+                  <a:rPr lang="en-US" sz="2400" b="1" dirty="0" err="1" smtClean="0"/>
+                  <a:t>niet</a:t>
+                </a:r>
+                <a:r>
+                  <a:rPr lang="en-US" sz="2400" b="1" dirty="0" smtClean="0"/>
+                  <a:t> </a:t>
+                </a:r>
+                <a:r>
+                  <a:rPr lang="en-US" sz="2400" b="1" dirty="0" err="1" smtClean="0"/>
+                  <a:t>telkens</a:t>
+                </a:r>
+                <a:r>
+                  <a:rPr lang="en-US" sz="2400" b="1" dirty="0" smtClean="0"/>
+                  <a:t> </a:t>
+                </a:r>
+                <a:r>
+                  <a:rPr lang="en-US" sz="2400" b="1" dirty="0" err="1" smtClean="0"/>
+                  <a:t>weer</a:t>
+                </a:r>
+                <a:r>
+                  <a:rPr lang="en-US" sz="2400" b="1" dirty="0" smtClean="0"/>
+                  <a:t> </a:t>
+                </a:r>
+                <a:r>
+                  <a:rPr lang="en-US" sz="2400" b="1" dirty="0" err="1" smtClean="0"/>
+                  <a:t>moeten</a:t>
+                </a:r>
+                <a:r>
+                  <a:rPr lang="en-US" sz="2400" b="1" dirty="0" smtClean="0"/>
+                  <a:t> </a:t>
+                </a:r>
+                <a:r>
+                  <a:rPr lang="en-US" sz="2400" b="1" dirty="0" err="1" smtClean="0"/>
+                  <a:t>invullen</a:t>
+                </a:r>
+                <a:r>
+                  <a:rPr lang="en-US" sz="2400" b="1" dirty="0" smtClean="0"/>
+                  <a:t> …</a:t>
+                </a:r>
+              </a:p>
             </p:txBody>
           </p:sp>
         </mc:Choice>
@@ -28327,7 +28658,7 @@
               <a:blipFill>
                 <a:blip r:embed="rId3"/>
                 <a:stretch>
-                  <a:fillRect l="-1678" b="-574"/>
+                  <a:fillRect l="-1678" b="-8178"/>
                 </a:stretch>
               </a:blipFill>
             </p:spPr>
@@ -28393,7 +28724,79 @@
   <p:timing>
     <p:tnLst>
       <p:par>
-        <p:cTn id="1" dur="indefinite" restart="never" nodeType="tmRoot"/>
+        <p:cTn id="1" dur="indefinite" restart="never" nodeType="tmRoot">
+          <p:childTnLst>
+            <p:seq concurrent="1" nextAc="seek">
+              <p:cTn id="2" dur="indefinite" nodeType="mainSeq">
+                <p:childTnLst>
+                  <p:par>
+                    <p:cTn id="3" fill="hold">
+                      <p:stCondLst>
+                        <p:cond delay="indefinite"/>
+                      </p:stCondLst>
+                      <p:childTnLst>
+                        <p:par>
+                          <p:cTn id="4" fill="hold">
+                            <p:stCondLst>
+                              <p:cond delay="0"/>
+                            </p:stCondLst>
+                            <p:childTnLst>
+                              <p:par>
+                                <p:cTn id="5" presetID="1" presetClass="entr" presetSubtype="0" fill="hold" nodeType="clickEffect">
+                                  <p:stCondLst>
+                                    <p:cond delay="0"/>
+                                  </p:stCondLst>
+                                  <p:childTnLst>
+                                    <p:set>
+                                      <p:cBhvr>
+                                        <p:cTn id="6" dur="1" fill="hold">
+                                          <p:stCondLst>
+                                            <p:cond delay="0"/>
+                                          </p:stCondLst>
+                                        </p:cTn>
+                                        <p:tgtEl>
+                                          <p:spTgt spid="6147">
+                                            <p:txEl>
+                                              <p:pRg st="9" end="9"/>
+                                            </p:txEl>
+                                          </p:spTgt>
+                                        </p:tgtEl>
+                                        <p:attrNameLst>
+                                          <p:attrName>style.visibility</p:attrName>
+                                        </p:attrNameLst>
+                                      </p:cBhvr>
+                                      <p:to>
+                                        <p:strVal val="visible"/>
+                                      </p:to>
+                                    </p:set>
+                                  </p:childTnLst>
+                                </p:cTn>
+                              </p:par>
+                            </p:childTnLst>
+                          </p:cTn>
+                        </p:par>
+                      </p:childTnLst>
+                    </p:cTn>
+                  </p:par>
+                </p:childTnLst>
+              </p:cTn>
+              <p:prevCondLst>
+                <p:cond evt="onPrev" delay="0">
+                  <p:tgtEl>
+                    <p:sldTgt/>
+                  </p:tgtEl>
+                </p:cond>
+              </p:prevCondLst>
+              <p:nextCondLst>
+                <p:cond evt="onNext" delay="0">
+                  <p:tgtEl>
+                    <p:sldTgt/>
+                  </p:tgtEl>
+                </p:cond>
+              </p:nextCondLst>
+            </p:seq>
+          </p:childTnLst>
+        </p:cTn>
       </p:par>
     </p:tnLst>
   </p:timing>
